--- a/dataset/guides_final/HW/guide/IT-HW-001_업무 PC 기본 장애 대응 가이드.pptx
+++ b/dataset/guides_final/HW/guide/IT-HW-001_업무 PC 기본 장애 대응 가이드.pptx
@@ -3257,7 +3257,7 @@
                 <a:ea typeface="Malgun Gothic"/>
                 <a:cs typeface="Malgun Gothic"/>
               </a:rPr>
-              <a:t>한화시스템 ICT 임직원 IT 안내 · HW·업무 PC</a:t>
+              <a:t>가상 ICT 기업 임직원 IT 안내 · HW·업무 PC</a:t>
             </a:r>
           </a:p>
         </p:txBody>
@@ -3489,7 +3489,7 @@
                 <a:ea typeface="Malgun Gothic"/>
                 <a:cs typeface="Malgun Gothic"/>
               </a:rPr>
-              <a:t>© HANWHA SYSTEMS ICT · IT-HW-001 · 사내 일반</a:t>
+              <a:t>© 가상 ICT 기업 · IT-HW-001 · 사내 일반</a:t>
             </a:r>
           </a:p>
         </p:txBody>
@@ -5485,7 +5485,7 @@
                 <a:ea typeface="Malgun Gothic"/>
                 <a:cs typeface="Malgun Gothic"/>
               </a:rPr>
-              <a:t>© HANWHA SYSTEMS ICT · IT-HW-001 · 사내 일반</a:t>
+              <a:t>© 가상 ICT 기업 · IT-HW-001 · 사내 일반</a:t>
             </a:r>
           </a:p>
         </p:txBody>
@@ -6803,7 +6803,7 @@
                 <a:ea typeface="Malgun Gothic"/>
                 <a:cs typeface="Malgun Gothic"/>
               </a:rPr>
-              <a:t>© HANWHA SYSTEMS ICT · IT-HW-001 · 사내 일반</a:t>
+              <a:t>© 가상 ICT 기업 · IT-HW-001 · 사내 일반</a:t>
             </a:r>
           </a:p>
         </p:txBody>
@@ -8941,7 +8941,7 @@
                 <a:ea typeface="Malgun Gothic"/>
                 <a:cs typeface="Malgun Gothic"/>
               </a:rPr>
-              <a:t>© HANWHA SYSTEMS ICT · IT-HW-001 · 사내 일반</a:t>
+              <a:t>© 가상 ICT 기업 · IT-HW-001 · 사내 일반</a:t>
             </a:r>
           </a:p>
         </p:txBody>
@@ -10305,7 +10305,7 @@
                 <a:ea typeface="Malgun Gothic"/>
                 <a:cs typeface="Malgun Gothic"/>
               </a:rPr>
-              <a:t>© HANWHA SYSTEMS ICT · IT-HW-001 · 사내 일반</a:t>
+              <a:t>© 가상 ICT 기업 · IT-HW-001 · 사내 일반</a:t>
             </a:r>
           </a:p>
         </p:txBody>
@@ -12301,7 +12301,7 @@
                 <a:ea typeface="Malgun Gothic"/>
                 <a:cs typeface="Malgun Gothic"/>
               </a:rPr>
-              <a:t>© HANWHA SYSTEMS ICT · IT-HW-001 · 사내 일반</a:t>
+              <a:t>© 가상 ICT 기업 · IT-HW-001 · 사내 일반</a:t>
             </a:r>
           </a:p>
         </p:txBody>
@@ -13595,7 +13595,7 @@
                 <a:ea typeface="Malgun Gothic"/>
                 <a:cs typeface="Malgun Gothic"/>
               </a:rPr>
-              <a:t>© HANWHA SYSTEMS ICT · IT-HW-001 · 사내 일반</a:t>
+              <a:t>© 가상 ICT 기업 · IT-HW-001 · 사내 일반</a:t>
             </a:r>
           </a:p>
         </p:txBody>
@@ -15433,7 +15433,7 @@
                 <a:ea typeface="Malgun Gothic"/>
                 <a:cs typeface="Malgun Gothic"/>
               </a:rPr>
-              <a:t>© HANWHA SYSTEMS ICT · IT-HW-001 · 사내 일반</a:t>
+              <a:t>© 가상 ICT 기업 · IT-HW-001 · 사내 일반</a:t>
             </a:r>
           </a:p>
         </p:txBody>
@@ -16727,7 +16727,7 @@
                 <a:ea typeface="Malgun Gothic"/>
                 <a:cs typeface="Malgun Gothic"/>
               </a:rPr>
-              <a:t>© HANWHA SYSTEMS ICT · IT-HW-001 · 사내 일반</a:t>
+              <a:t>© 가상 ICT 기업 · IT-HW-001 · 사내 일반</a:t>
             </a:r>
           </a:p>
         </p:txBody>
@@ -18377,7 +18377,7 @@
                 <a:ea typeface="Malgun Gothic"/>
                 <a:cs typeface="Malgun Gothic"/>
               </a:rPr>
-              <a:t>© HANWHA SYSTEMS ICT · IT-HW-001 · 사내 일반</a:t>
+              <a:t>© 가상 ICT 기업 · IT-HW-001 · 사내 일반</a:t>
             </a:r>
           </a:p>
         </p:txBody>
@@ -19765,7 +19765,7 @@
                 <a:ea typeface="Malgun Gothic"/>
                 <a:cs typeface="Malgun Gothic"/>
               </a:rPr>
-              <a:t>© HANWHA SYSTEMS ICT · IT-HW-001 · 사내 일반</a:t>
+              <a:t>© 가상 ICT 기업 · IT-HW-001 · 사내 일반</a:t>
             </a:r>
           </a:p>
         </p:txBody>
@@ -21618,7 +21618,7 @@
                 <a:ea typeface="Malgun Gothic"/>
                 <a:cs typeface="Malgun Gothic"/>
               </a:rPr>
-              <a:t>© HANWHA SYSTEMS ICT · IT-HW-001 · 사내 일반</a:t>
+              <a:t>© 가상 ICT 기업 · IT-HW-001 · 사내 일반</a:t>
             </a:r>
           </a:p>
         </p:txBody>
@@ -23338,7 +23338,7 @@
                 <a:ea typeface="Malgun Gothic"/>
                 <a:cs typeface="Malgun Gothic"/>
               </a:rPr>
-              <a:t>© HANWHA SYSTEMS ICT · IT-HW-001 · 사내 일반</a:t>
+              <a:t>© 가상 ICT 기업 · IT-HW-001 · 사내 일반</a:t>
             </a:r>
           </a:p>
         </p:txBody>
@@ -24538,7 +24538,7 @@
                 <a:ea typeface="Malgun Gothic"/>
                 <a:cs typeface="Malgun Gothic"/>
               </a:rPr>
-              <a:t>© HANWHA SYSTEMS ICT · IT-HW-001 · 사내 일반</a:t>
+              <a:t>© 가상 ICT 기업 · IT-HW-001 · 사내 일반</a:t>
             </a:r>
           </a:p>
         </p:txBody>
@@ -26070,7 +26070,7 @@
                 <a:ea typeface="Malgun Gothic"/>
                 <a:cs typeface="Malgun Gothic"/>
               </a:rPr>
-              <a:t>© HANWHA SYSTEMS ICT · IT-HW-001 · 사내 일반</a:t>
+              <a:t>© 가상 ICT 기업 · IT-HW-001 · 사내 일반</a:t>
             </a:r>
           </a:p>
         </p:txBody>
@@ -27388,7 +27388,7 @@
                 <a:ea typeface="Malgun Gothic"/>
                 <a:cs typeface="Malgun Gothic"/>
               </a:rPr>
-              <a:t>© HANWHA SYSTEMS ICT · IT-HW-001 · 사내 일반</a:t>
+              <a:t>© 가상 ICT 기업 · IT-HW-001 · 사내 일반</a:t>
             </a:r>
           </a:p>
         </p:txBody>
@@ -29196,7 +29196,7 @@
                 <a:ea typeface="Malgun Gothic"/>
                 <a:cs typeface="Malgun Gothic"/>
               </a:rPr>
-              <a:t>© HANWHA SYSTEMS ICT · IT-HW-001 · 사내 일반</a:t>
+              <a:t>© 가상 ICT 기업 · IT-HW-001 · 사내 일반</a:t>
             </a:r>
           </a:p>
         </p:txBody>
@@ -30466,7 +30466,7 @@
                 <a:ea typeface="Malgun Gothic"/>
                 <a:cs typeface="Malgun Gothic"/>
               </a:rPr>
-              <a:t>© HANWHA SYSTEMS ICT · IT-HW-001 · 사내 일반</a:t>
+              <a:t>© 가상 ICT 기업 · IT-HW-001 · 사내 일반</a:t>
             </a:r>
           </a:p>
         </p:txBody>
@@ -32344,7 +32344,7 @@
                 <a:ea typeface="Malgun Gothic"/>
                 <a:cs typeface="Malgun Gothic"/>
               </a:rPr>
-              <a:t>© HANWHA SYSTEMS ICT · IT-HW-001 · 사내 일반</a:t>
+              <a:t>© 가상 ICT 기업 · IT-HW-001 · 사내 일반</a:t>
             </a:r>
           </a:p>
         </p:txBody>
@@ -33520,7 +33520,7 @@
                 <a:ea typeface="Malgun Gothic"/>
                 <a:cs typeface="Malgun Gothic"/>
               </a:rPr>
-              <a:t>© HANWHA SYSTEMS ICT · IT-HW-001 · 사내 일반</a:t>
+              <a:t>© 가상 ICT 기업 · IT-HW-001 · 사내 일반</a:t>
             </a:r>
           </a:p>
         </p:txBody>
@@ -35446,7 +35446,7 @@
                 <a:ea typeface="Malgun Gothic"/>
                 <a:cs typeface="Malgun Gothic"/>
               </a:rPr>
-              <a:t>© HANWHA SYSTEMS ICT · IT-HW-001 · 사내 일반</a:t>
+              <a:t>© 가상 ICT 기업 · IT-HW-001 · 사내 일반</a:t>
             </a:r>
           </a:p>
         </p:txBody>
@@ -36740,7 +36740,7 @@
                 <a:ea typeface="Malgun Gothic"/>
                 <a:cs typeface="Malgun Gothic"/>
               </a:rPr>
-              <a:t>© HANWHA SYSTEMS ICT · IT-HW-001 · 사내 일반</a:t>
+              <a:t>© 가상 ICT 기업 · IT-HW-001 · 사내 일반</a:t>
             </a:r>
           </a:p>
         </p:txBody>
@@ -38016,7 +38016,7 @@
                 <a:ea typeface="Malgun Gothic"/>
                 <a:cs typeface="Malgun Gothic"/>
               </a:rPr>
-              <a:t>© HANWHA SYSTEMS ICT · IT-HW-001 · 사내 일반</a:t>
+              <a:t>© 가상 ICT 기업 · IT-HW-001 · 사내 일반</a:t>
             </a:r>
           </a:p>
         </p:txBody>
@@ -39824,7 +39824,7 @@
                 <a:ea typeface="Malgun Gothic"/>
                 <a:cs typeface="Malgun Gothic"/>
               </a:rPr>
-              <a:t>© HANWHA SYSTEMS ICT · IT-HW-001 · 사내 일반</a:t>
+              <a:t>© 가상 ICT 기업 · IT-HW-001 · 사내 일반</a:t>
             </a:r>
           </a:p>
         </p:txBody>
@@ -41000,7 +41000,7 @@
                 <a:ea typeface="Malgun Gothic"/>
                 <a:cs typeface="Malgun Gothic"/>
               </a:rPr>
-              <a:t>© HANWHA SYSTEMS ICT · IT-HW-001 · 사내 일반</a:t>
+              <a:t>© 가상 ICT 기업 · IT-HW-001 · 사내 일반</a:t>
             </a:r>
           </a:p>
         </p:txBody>
@@ -42626,7 +42626,7 @@
                 <a:ea typeface="Malgun Gothic"/>
                 <a:cs typeface="Malgun Gothic"/>
               </a:rPr>
-              <a:t>© HANWHA SYSTEMS ICT · IT-HW-001 · 사내 일반</a:t>
+              <a:t>© 가상 ICT 기업 · IT-HW-001 · 사내 일반</a:t>
             </a:r>
           </a:p>
         </p:txBody>
@@ -44014,7 +44014,7 @@
                 <a:ea typeface="Malgun Gothic"/>
                 <a:cs typeface="Malgun Gothic"/>
               </a:rPr>
-              <a:t>© HANWHA SYSTEMS ICT · IT-HW-001 · 사내 일반</a:t>
+              <a:t>© 가상 ICT 기업 · IT-HW-001 · 사내 일반</a:t>
             </a:r>
           </a:p>
         </p:txBody>
@@ -45664,7 +45664,7 @@
                 <a:ea typeface="Malgun Gothic"/>
                 <a:cs typeface="Malgun Gothic"/>
               </a:rPr>
-              <a:t>© HANWHA SYSTEMS ICT · IT-HW-001 · 사내 일반</a:t>
+              <a:t>© 가상 ICT 기업 · IT-HW-001 · 사내 일반</a:t>
             </a:r>
           </a:p>
         </p:txBody>
@@ -46934,7 +46934,7 @@
                 <a:ea typeface="Malgun Gothic"/>
                 <a:cs typeface="Malgun Gothic"/>
               </a:rPr>
-              <a:t>© HANWHA SYSTEMS ICT · IT-HW-001 · 사내 일반</a:t>
+              <a:t>© 가상 ICT 기업 · IT-HW-001 · 사내 일반</a:t>
             </a:r>
           </a:p>
         </p:txBody>
@@ -47182,7 +47182,7 @@
                 <a:ea typeface="Malgun Gothic"/>
                 <a:cs typeface="Malgun Gothic"/>
               </a:rPr>
-              <a:t>© HANWHA SYSTEMS ICT · IT-HW-001 · 사내 일반</a:t>
+              <a:t>© 가상 ICT 기업 · IT-HW-001 · 사내 일반</a:t>
             </a:r>
           </a:p>
         </p:txBody>
@@ -47851,7 +47851,7 @@
                 <a:ea typeface="Malgun Gothic"/>
                 <a:cs typeface="Malgun Gothic"/>
               </a:rPr>
-              <a:t>© HANWHA SYSTEMS ICT · IT-HW-001 · 사내 일반</a:t>
+              <a:t>© 가상 ICT 기업 · IT-HW-001 · 사내 일반</a:t>
             </a:r>
           </a:p>
         </p:txBody>
@@ -48099,7 +48099,7 @@
                 <a:ea typeface="Malgun Gothic"/>
                 <a:cs typeface="Malgun Gothic"/>
               </a:rPr>
-              <a:t>© HANWHA SYSTEMS ICT · IT-HW-001 · 사내 일반</a:t>
+              <a:t>© 가상 ICT 기업 · IT-HW-001 · 사내 일반</a:t>
             </a:r>
           </a:p>
         </p:txBody>
@@ -48758,7 +48758,7 @@
                 <a:ea typeface="Malgun Gothic"/>
                 <a:cs typeface="Malgun Gothic"/>
               </a:rPr>
-              <a:t>© HANWHA SYSTEMS ICT · IT-HW-001 · 사내 일반</a:t>
+              <a:t>© 가상 ICT 기업 · IT-HW-001 · 사내 일반</a:t>
             </a:r>
           </a:p>
         </p:txBody>
@@ -49006,7 +49006,7 @@
                 <a:ea typeface="Malgun Gothic"/>
                 <a:cs typeface="Malgun Gothic"/>
               </a:rPr>
-              <a:t>© HANWHA SYSTEMS ICT · IT-HW-001 · 사내 일반</a:t>
+              <a:t>© 가상 ICT 기업 · IT-HW-001 · 사내 일반</a:t>
             </a:r>
           </a:p>
         </p:txBody>
@@ -49254,7 +49254,7 @@
                 <a:ea typeface="Malgun Gothic"/>
                 <a:cs typeface="Malgun Gothic"/>
               </a:rPr>
-              <a:t>© HANWHA SYSTEMS ICT · IT-HW-001 · 사내 일반</a:t>
+              <a:t>© 가상 ICT 기업 · IT-HW-001 · 사내 일반</a:t>
             </a:r>
           </a:p>
         </p:txBody>
@@ -49766,7 +49766,7 @@
                           <a:ea typeface="Malgun Gothic"/>
                           <a:cs typeface="Malgun Gothic"/>
                         </a:rPr>
-                        <a:t>사내 IT 포털(hanwha-admin) 상단 [챗봇 문의]</a:t>
+                        <a:t>사내 IT 포털 상단 [챗봇 문의]</a:t>
                       </a:r>
                     </a:p>
                   </a:txBody>
@@ -50458,7 +50458,7 @@
                           <a:ea typeface="Malgun Gothic"/>
                           <a:cs typeface="Malgun Gothic"/>
                         </a:rPr>
-                        <a:t>it-helpdesk@hanwha-ict.example</a:t>
+                        <a:t>it-helpdesk@ict.example</a:t>
                       </a:r>
                     </a:p>
                   </a:txBody>
@@ -50757,7 +50757,7 @@
                 <a:ea typeface="Malgun Gothic"/>
                 <a:cs typeface="Malgun Gothic"/>
               </a:rPr>
-              <a:t>© HANWHA SYSTEMS ICT · IT-HW-001 · 사내 일반</a:t>
+              <a:t>© 가상 ICT 기업 · IT-HW-001 · 사내 일반</a:t>
             </a:r>
           </a:p>
         </p:txBody>
@@ -51005,7 +51005,7 @@
                 <a:ea typeface="Malgun Gothic"/>
                 <a:cs typeface="Malgun Gothic"/>
               </a:rPr>
-              <a:t>© HANWHA SYSTEMS ICT · IT-HW-001 · 사내 일반</a:t>
+              <a:t>© 가상 ICT 기업 · IT-HW-001 · 사내 일반</a:t>
             </a:r>
           </a:p>
         </p:txBody>
@@ -52997,7 +52997,7 @@
                 <a:ea typeface="Malgun Gothic"/>
                 <a:cs typeface="Malgun Gothic"/>
               </a:rPr>
-              <a:t>© HANWHA SYSTEMS ICT · IT-HW-001 · 사내 일반</a:t>
+              <a:t>© 가상 ICT 기업 · IT-HW-001 · 사내 일반</a:t>
             </a:r>
           </a:p>
         </p:txBody>
@@ -53974,7 +53974,7 @@
                 <a:ea typeface="Malgun Gothic"/>
                 <a:cs typeface="Malgun Gothic"/>
               </a:rPr>
-              <a:t>© HANWHA SYSTEMS ICT · IT-HW-001 · 사내 일반</a:t>
+              <a:t>© 가상 ICT 기업 · IT-HW-001 · 사내 일반</a:t>
             </a:r>
           </a:p>
         </p:txBody>
@@ -54878,7 +54878,7 @@
                 <a:ea typeface="Malgun Gothic"/>
                 <a:cs typeface="Malgun Gothic"/>
               </a:rPr>
-              <a:t>© HANWHA SYSTEMS ICT · IT-HW-001 · 사내 일반</a:t>
+              <a:t>© 가상 ICT 기업 · IT-HW-001 · 사내 일반</a:t>
             </a:r>
           </a:p>
         </p:txBody>
@@ -55126,7 +55126,7 @@
                 <a:ea typeface="Malgun Gothic"/>
                 <a:cs typeface="Malgun Gothic"/>
               </a:rPr>
-              <a:t>© HANWHA SYSTEMS ICT · IT-HW-001 · 사내 일반</a:t>
+              <a:t>© 가상 ICT 기업 · IT-HW-001 · 사내 일반</a:t>
             </a:r>
           </a:p>
         </p:txBody>
@@ -55973,7 +55973,7 @@
                 <a:ea typeface="Malgun Gothic"/>
                 <a:cs typeface="Malgun Gothic"/>
               </a:rPr>
-              <a:t>© HANWHA SYSTEMS ICT · IT-HW-001 · 사내 일반</a:t>
+              <a:t>© 가상 ICT 기업 · IT-HW-001 · 사내 일반</a:t>
             </a:r>
           </a:p>
         </p:txBody>
@@ -56221,7 +56221,7 @@
                 <a:ea typeface="Malgun Gothic"/>
                 <a:cs typeface="Malgun Gothic"/>
               </a:rPr>
-              <a:t>© HANWHA SYSTEMS ICT · IT-HW-001 · 사내 일반</a:t>
+              <a:t>© 가상 ICT 기업 · IT-HW-001 · 사내 일반</a:t>
             </a:r>
           </a:p>
         </p:txBody>
@@ -60411,7 +60411,7 @@
                 <a:ea typeface="Malgun Gothic"/>
                 <a:cs typeface="Malgun Gothic"/>
               </a:rPr>
-              <a:t>© HANWHA SYSTEMS ICT · IT-HW-001 · 사내 일반</a:t>
+              <a:t>© 가상 ICT 기업 · IT-HW-001 · 사내 일반</a:t>
             </a:r>
           </a:p>
         </p:txBody>
